--- a/docs/Sahil_Ahamed_Shaik_Portfolio.pptx
+++ b/docs/Sahil_Ahamed_Shaik_Portfolio.pptx
@@ -2458,13 +2458,31 @@
               <a:buNone/>
             </a:pPr>
             <a:r>
-              <a:rPr sz="1200">
+              <a:rPr sz="1200" dirty="0">
                 <a:solidFill>
                   <a:srgbClr val="E2E8F0"/>
                 </a:solidFill>
                 <a:latin typeface="Calibri"/>
               </a:rPr>
-              <a:t>Master’s in Robotics — UNSW Sydney  |  B.Tech Mechatronics — Hindustan Institute of Technology &amp; Sciences (HITS)</a:t>
+              <a:t>Master’s in Robotics — UNSW Sydney  |  </a:t>
+            </a:r>
+            <a:r>
+              <a:rPr sz="1200" dirty="0" err="1">
+                <a:solidFill>
+                  <a:srgbClr val="E2E8F0"/>
+                </a:solidFill>
+                <a:latin typeface="Calibri"/>
+              </a:rPr>
+              <a:t>B.Tech</a:t>
+            </a:r>
+            <a:r>
+              <a:rPr sz="1200" dirty="0">
+                <a:solidFill>
+                  <a:srgbClr val="E2E8F0"/>
+                </a:solidFill>
+                <a:latin typeface="Calibri"/>
+              </a:rPr>
+              <a:t> Mechatronics — Hindustan Institute of Technology &amp; Sciences (HITS)</a:t>
             </a:r>
             <a:endParaRPr lang="en-US" sz="1100" dirty="0"/>
           </a:p>
@@ -17758,7 +17776,7 @@
           <a:bodyPr/>
           <a:lstStyle/>
           <a:p>
-            <a:endParaRPr/>
+            <a:endParaRPr dirty="0"/>
           </a:p>
         </p:txBody>
       </p:sp>
@@ -17791,35 +17809,6 @@
       </p:sp>
       <p:sp>
         <p:nvSpPr>
-          <p:cNvPr id="49" name="Shape 41"/>
-          <p:cNvSpPr/>
-          <p:nvPr/>
-        </p:nvSpPr>
-        <p:spPr>
-          <a:xfrm>
-            <a:off x="8092440" y="3127248"/>
-            <a:ext cx="713232" cy="201168"/>
-          </a:xfrm>
-          <a:prstGeom prst="rect">
-            <a:avLst/>
-          </a:prstGeom>
-          <a:solidFill>
-            <a:srgbClr val="C9892A">
-              <a:alpha val="25000"/>
-            </a:srgbClr>
-          </a:solidFill>
-          <a:ln/>
-        </p:spPr>
-        <p:txBody>
-          <a:bodyPr/>
-          <a:lstStyle/>
-          <a:p>
-            <a:endParaRPr/>
-          </a:p>
-        </p:txBody>
-      </p:sp>
-      <p:sp>
-        <p:nvSpPr>
           <p:cNvPr id="50" name="Text 42"/>
           <p:cNvSpPr/>
           <p:nvPr/>
@@ -17842,17 +17831,6 @@
             <a:pPr marL="0" indent="0" algn="ctr">
               <a:buNone/>
             </a:pPr>
-            <a:r>
-              <a:rPr lang="en-US" sz="750" b="1" dirty="0">
-                <a:solidFill>
-                  <a:srgbClr val="C9892A"/>
-                </a:solidFill>
-                <a:latin typeface="Calibri" pitchFamily="34" charset="0"/>
-                <a:ea typeface="Calibri" pitchFamily="34" charset="-122"/>
-                <a:cs typeface="Calibri" pitchFamily="34" charset="-120"/>
-              </a:rPr>
-              <a:t>In Progress</a:t>
-            </a:r>
             <a:endParaRPr lang="en-US" sz="750" dirty="0"/>
           </a:p>
         </p:txBody>
@@ -17980,9 +17958,6 @@
           <a:bodyPr wrap="square" rtlCol="0" anchor="ctr"/>
           <a:lstStyle/>
           <a:p>
-            <a:pPr marL="0" indent="0">
-              <a:buNone/>
-            </a:pPr>
             <a:r>
               <a:rPr lang="en-US" sz="900" b="1" dirty="0">
                 <a:solidFill>
@@ -17992,7 +17967,7 @@
                 <a:ea typeface="Calibri" pitchFamily="34" charset="-122"/>
                 <a:cs typeface="Calibri" pitchFamily="34" charset="-120"/>
               </a:rPr>
-              <a:t>In Progress</a:t>
+              <a:t>Udemy</a:t>
             </a:r>
             <a:endParaRPr lang="en-US" sz="900" dirty="0"/>
           </a:p>
@@ -18029,6 +18004,86 @@
               </a:rPr>
               <a:t>Courses and training supporting robotics, AI and simulation.</a:t>
             </a:r>
+          </a:p>
+        </p:txBody>
+      </p:sp>
+      <p:sp>
+        <p:nvSpPr>
+          <p:cNvPr id="56" name="Shape 34">
+            <a:extLst>
+              <a:ext uri="{FF2B5EF4-FFF2-40B4-BE49-F238E27FC236}">
+                <a16:creationId xmlns:a16="http://schemas.microsoft.com/office/drawing/2014/main" id="{1003A041-392C-F978-3D74-9B55783A19A2}"/>
+              </a:ext>
+            </a:extLst>
+          </p:cNvPr>
+          <p:cNvSpPr/>
+          <p:nvPr/>
+        </p:nvSpPr>
+        <p:spPr>
+          <a:xfrm>
+            <a:off x="8156448" y="3108960"/>
+            <a:ext cx="713232" cy="201168"/>
+          </a:xfrm>
+          <a:prstGeom prst="rect">
+            <a:avLst/>
+          </a:prstGeom>
+          <a:solidFill>
+            <a:srgbClr val="2E7D32">
+              <a:alpha val="25000"/>
+            </a:srgbClr>
+          </a:solidFill>
+          <a:ln/>
+        </p:spPr>
+        <p:txBody>
+          <a:bodyPr/>
+          <a:lstStyle/>
+          <a:p>
+            <a:endParaRPr/>
+          </a:p>
+        </p:txBody>
+      </p:sp>
+      <p:sp>
+        <p:nvSpPr>
+          <p:cNvPr id="57" name="Text 35">
+            <a:extLst>
+              <a:ext uri="{FF2B5EF4-FFF2-40B4-BE49-F238E27FC236}">
+                <a16:creationId xmlns:a16="http://schemas.microsoft.com/office/drawing/2014/main" id="{87E54F4D-4E69-CA81-E80A-CBF188882093}"/>
+              </a:ext>
+            </a:extLst>
+          </p:cNvPr>
+          <p:cNvSpPr/>
+          <p:nvPr/>
+        </p:nvSpPr>
+        <p:spPr>
+          <a:xfrm>
+            <a:off x="8156448" y="3124200"/>
+            <a:ext cx="713232" cy="182880"/>
+          </a:xfrm>
+          <a:prstGeom prst="rect">
+            <a:avLst/>
+          </a:prstGeom>
+          <a:noFill/>
+          <a:ln/>
+        </p:spPr>
+        <p:txBody>
+          <a:bodyPr wrap="square" rtlCol="0" anchor="ctr"/>
+          <a:lstStyle/>
+          <a:p>
+            <a:pPr marL="0" indent="0" algn="ctr">
+              <a:buNone/>
+            </a:pPr>
+            <a:r>
+              <a:rPr lang="en-US" sz="750" b="1" dirty="0">
+                <a:solidFill>
+                  <a:srgbClr val="2E7D32"/>
+                </a:solidFill>
+                <a:latin typeface="Calibri" pitchFamily="34" charset="0"/>
+                <a:ea typeface="Calibri" pitchFamily="34" charset="-122"/>
+                <a:cs typeface="Calibri" pitchFamily="34" charset="-120"/>
+              </a:rPr>
+              <a:t>Completed</a:t>
+            </a:r>
+            <a:endParaRPr lang="en-US" sz="750" dirty="0"/>
           </a:p>
         </p:txBody>
       </p:sp>
